--- a/tests/fixtures/themes/templated/template.pptx
+++ b/tests/fixtures/themes/templated/template.pptx
@@ -141,6 +141,117 @@
 
 <file path=ppt/slideLayouts/slideLayout4.xml><?xml version="1.0" encoding="utf-8"?>
 <p:sldLayout xmlns:p="http://schemas.openxmlformats.org/presentationml/2006/main" xmlns:a="http://schemas.openxmlformats.org/drawingml/2006/main">
+  <p:cSld name="Picture Left">
+    <p:spTree>
+      <p:sp>
+        <p:nvSpPr>
+          <p:cNvPr id="2" name="Shape 2"/>
+          <p:nvPr>
+            <p:ph type="title"/>
+          </p:nvPr>
+        </p:nvSpPr>
+        <p:spPr>
+          <a:xfrm>
+            <a:off x="838200" y="685800"/>
+            <a:ext cx="10515600" cy="1000125"/>
+          </a:xfrm>
+        </p:spPr>
+      </p:sp>
+      <p:sp>
+        <p:nvSpPr>
+          <p:cNvPr id="3" name="Shape 3"/>
+          <p:nvPr>
+            <p:ph type="body" idx="2"/>
+          </p:nvPr>
+        </p:nvSpPr>
+        <p:spPr>
+          <a:xfrm>
+            <a:off x="6096000" y="1828800"/>
+            <a:ext cx="5029200" cy="4114800"/>
+          </a:xfrm>
+        </p:spPr>
+      </p:sp>
+      <p:sp>
+        <p:nvSpPr>
+          <p:cNvPr id="4" name="Shape 4"/>
+          <p:nvPr>
+            <p:ph type="pic" idx="1"/>
+          </p:nvPr>
+        </p:nvSpPr>
+        <p:spPr>
+          <a:xfrm>
+            <a:off x="838200" y="1828800"/>
+            <a:ext cx="4785360" cy="4114800"/>
+          </a:xfrm>
+        </p:spPr>
+      </p:sp>
+    </p:spTree>
+  </p:cSld>
+</p:sldLayout>
+</file>
+
+<file path=ppt/slideLayouts/slideLayout5.xml><?xml version="1.0" encoding="utf-8"?>
+<p:sldLayout xmlns:p="http://schemas.openxmlformats.org/presentationml/2006/main" xmlns:a="http://schemas.openxmlformats.org/drawingml/2006/main">
+  <p:cSld name="Picture with Caption">
+    <p:spTree>
+      <p:sp>
+        <p:nvSpPr>
+          <p:cNvPr id="2" name="Shape 2"/>
+          <p:nvPr>
+            <p:ph type="title"/>
+          </p:nvPr>
+        </p:nvSpPr>
+        <p:spPr>
+          <a:xfrm>
+            <a:off x="838200" y="685800"/>
+            <a:ext cx="10515600" cy="1000125"/>
+          </a:xfrm>
+        </p:spPr>
+      </p:sp>
+      <p:sp>
+        <p:nvSpPr>
+          <p:cNvPr id="3" name="Shape 3"/>
+          <p:nvPr>
+            <p:ph type="pic" idx="1"/>
+          </p:nvPr>
+        </p:nvSpPr>
+        <p:spPr>
+          <a:xfrm>
+            <a:off x="838200" y="1828800"/>
+            <a:ext cx="10515600" cy="4114800"/>
+          </a:xfrm>
+        </p:spPr>
+      </p:sp>
+    </p:spTree>
+  </p:cSld>
+</p:sldLayout>
+</file>
+
+<file path=ppt/slideLayouts/slideLayout6.xml><?xml version="1.0" encoding="utf-8"?>
+<p:sldLayout xmlns:p="http://schemas.openxmlformats.org/presentationml/2006/main" xmlns:a="http://schemas.openxmlformats.org/drawingml/2006/main">
+  <p:cSld name="Full Bleed Picture">
+    <p:spTree>
+      <p:sp>
+        <p:nvSpPr>
+          <p:cNvPr id="2" name="Shape 2"/>
+          <p:nvPr>
+            <p:ph type="pic" idx="1"/>
+          </p:nvPr>
+        </p:nvSpPr>
+        <p:spPr>
+          <a:xfrm>
+            <a:off x="0" y="0"/>
+            <a:ext cx="12192000" cy="6858000"/>
+          </a:xfrm>
+        </p:spPr>
+      </p:sp>
+    </p:spTree>
+  </p:cSld>
+</p:sldLayout>
+</file>
+
+<file path=ppt/slideLayouts/slideLayout7.xml><?xml version="1.0" encoding="utf-8"?>
+<p:sldLayout xmlns:p="http://schemas.openxmlformats.org/presentationml/2006/main" xmlns:a="http://schemas.openxmlformats.org/drawingml/2006/main">
   <p:cSld name="Blank">
     <p:spTree/>
   </p:cSld>
